--- a/word-drafts/figures/Observability-Fig14-Robotics-DataSet.pptx
+++ b/word-drafts/figures/Observability-Fig14-Robotics-DataSet.pptx
@@ -4493,7 +4493,7 @@
         <p:spPr>
           <a:xfrm>
             <a:off x="7167562" y="1228725"/>
-            <a:ext cx="504825" cy="123825"/>
+            <a:ext cx="638175" cy="123825"/>
           </a:xfrm>
           <a:prstGeom prst="rect">
             <a:avLst/>
@@ -4564,7 +4564,7 @@
         <p:spPr>
           <a:xfrm>
             <a:off x="8453437" y="1228725"/>
-            <a:ext cx="619125" cy="123825"/>
+            <a:ext cx="762000" cy="123825"/>
           </a:xfrm>
           <a:prstGeom prst="rect">
             <a:avLst/>
@@ -4636,7 +4636,7 @@
         <p:spPr>
           <a:xfrm>
             <a:off x="6524625" y="2314575"/>
-            <a:ext cx="485775" cy="123825"/>
+            <a:ext cx="609600" cy="123825"/>
           </a:xfrm>
           <a:prstGeom prst="rect">
             <a:avLst/>
@@ -4707,7 +4707,7 @@
         <p:spPr>
           <a:xfrm>
             <a:off x="7810500" y="2314575"/>
-            <a:ext cx="619125" cy="123825"/>
+            <a:ext cx="762000" cy="123825"/>
           </a:xfrm>
           <a:prstGeom prst="rect">
             <a:avLst/>
@@ -4778,7 +4778,7 @@
         <p:spPr>
           <a:xfrm>
             <a:off x="3952875" y="3400425"/>
-            <a:ext cx="619125" cy="123825"/>
+            <a:ext cx="762000" cy="123825"/>
           </a:xfrm>
           <a:prstGeom prst="rect">
             <a:avLst/>
@@ -4849,7 +4849,7 @@
         <p:spPr>
           <a:xfrm>
             <a:off x="1381125" y="5029200"/>
-            <a:ext cx="542925" cy="123825"/>
+            <a:ext cx="666750" cy="123825"/>
           </a:xfrm>
           <a:prstGeom prst="rect">
             <a:avLst/>
@@ -4920,7 +4920,7 @@
         <p:spPr>
           <a:xfrm>
             <a:off x="5238750" y="3400425"/>
-            <a:ext cx="619125" cy="123825"/>
+            <a:ext cx="762000" cy="123825"/>
           </a:xfrm>
           <a:prstGeom prst="rect">
             <a:avLst/>
@@ -4991,7 +4991,7 @@
         <p:spPr>
           <a:xfrm>
             <a:off x="3952875" y="5457825"/>
-            <a:ext cx="542925" cy="123825"/>
+            <a:ext cx="666750" cy="123825"/>
           </a:xfrm>
           <a:prstGeom prst="rect">
             <a:avLst/>
@@ -5062,7 +5062,7 @@
         <p:spPr>
           <a:xfrm>
             <a:off x="6524625" y="3400425"/>
-            <a:ext cx="619125" cy="123825"/>
+            <a:ext cx="762000" cy="123825"/>
           </a:xfrm>
           <a:prstGeom prst="rect">
             <a:avLst/>
@@ -5133,7 +5133,7 @@
         <p:spPr>
           <a:xfrm>
             <a:off x="6524625" y="5457825"/>
-            <a:ext cx="542925" cy="123825"/>
+            <a:ext cx="666750" cy="123825"/>
           </a:xfrm>
           <a:prstGeom prst="rect">
             <a:avLst/>
@@ -5204,7 +5204,7 @@
         <p:spPr>
           <a:xfrm>
             <a:off x="9096375" y="2314575"/>
-            <a:ext cx="619125" cy="123825"/>
+            <a:ext cx="762000" cy="123825"/>
           </a:xfrm>
           <a:prstGeom prst="rect">
             <a:avLst/>
@@ -5275,7 +5275,7 @@
         <p:spPr>
           <a:xfrm>
             <a:off x="9096375" y="3400425"/>
-            <a:ext cx="619125" cy="123825"/>
+            <a:ext cx="762000" cy="123825"/>
           </a:xfrm>
           <a:prstGeom prst="rect">
             <a:avLst/>
@@ -5347,7 +5347,7 @@
         <p:spPr>
           <a:xfrm>
             <a:off x="9096375" y="5457825"/>
-            <a:ext cx="438150" cy="123825"/>
+            <a:ext cx="552450" cy="123825"/>
           </a:xfrm>
           <a:prstGeom prst="rect">
             <a:avLst/>
@@ -5418,7 +5418,7 @@
         <p:spPr>
           <a:xfrm>
             <a:off x="10382250" y="3400425"/>
-            <a:ext cx="619125" cy="123825"/>
+            <a:ext cx="762000" cy="123825"/>
           </a:xfrm>
           <a:prstGeom prst="rect">
             <a:avLst/>
@@ -5490,7 +5490,7 @@
         <p:spPr>
           <a:xfrm>
             <a:off x="11668125" y="5029200"/>
-            <a:ext cx="438150" cy="123825"/>
+            <a:ext cx="552450" cy="123825"/>
           </a:xfrm>
           <a:prstGeom prst="rect">
             <a:avLst/>
@@ -5561,7 +5561,7 @@
         <p:spPr>
           <a:xfrm>
             <a:off x="11668125" y="3400425"/>
-            <a:ext cx="619125" cy="123825"/>
+            <a:ext cx="762000" cy="123825"/>
           </a:xfrm>
           <a:prstGeom prst="rect">
             <a:avLst/>
@@ -5633,7 +5633,7 @@
         <p:spPr>
           <a:xfrm>
             <a:off x="14239875" y="5029200"/>
-            <a:ext cx="438150" cy="123825"/>
+            <a:ext cx="552450" cy="123825"/>
           </a:xfrm>
           <a:prstGeom prst="rect">
             <a:avLst/>
@@ -5704,7 +5704,7 @@
         <p:spPr>
           <a:xfrm>
             <a:off x="10382250" y="2314575"/>
-            <a:ext cx="619125" cy="123825"/>
+            <a:ext cx="762000" cy="123825"/>
           </a:xfrm>
           <a:prstGeom prst="rect">
             <a:avLst/>
@@ -5775,7 +5775,7 @@
         <p:spPr>
           <a:xfrm>
             <a:off x="8453437" y="4371975"/>
-            <a:ext cx="619125" cy="123825"/>
+            <a:ext cx="762000" cy="123825"/>
           </a:xfrm>
           <a:prstGeom prst="rect">
             <a:avLst/>
@@ -5847,7 +5847,7 @@
         <p:spPr>
           <a:xfrm>
             <a:off x="5238750" y="6543675"/>
-            <a:ext cx="438150" cy="123825"/>
+            <a:ext cx="552450" cy="123825"/>
           </a:xfrm>
           <a:prstGeom prst="rect">
             <a:avLst/>
@@ -5918,7 +5918,7 @@
         <p:spPr>
           <a:xfrm>
             <a:off x="9739312" y="4371975"/>
-            <a:ext cx="619125" cy="123825"/>
+            <a:ext cx="762000" cy="123825"/>
           </a:xfrm>
           <a:prstGeom prst="rect">
             <a:avLst/>
@@ -5990,7 +5990,7 @@
         <p:spPr>
           <a:xfrm>
             <a:off x="7810500" y="6543675"/>
-            <a:ext cx="438150" cy="123825"/>
+            <a:ext cx="552450" cy="123825"/>
           </a:xfrm>
           <a:prstGeom prst="rect">
             <a:avLst/>
@@ -6061,7 +6061,7 @@
         <p:spPr>
           <a:xfrm>
             <a:off x="11025187" y="4371975"/>
-            <a:ext cx="619125" cy="123825"/>
+            <a:ext cx="762000" cy="123825"/>
           </a:xfrm>
           <a:prstGeom prst="rect">
             <a:avLst/>
@@ -6133,7 +6133,7 @@
         <p:spPr>
           <a:xfrm>
             <a:off x="10382250" y="6543675"/>
-            <a:ext cx="438150" cy="123825"/>
+            <a:ext cx="552450" cy="123825"/>
           </a:xfrm>
           <a:prstGeom prst="rect">
             <a:avLst/>
